--- a/flashpoint/deck/FlashPoint-Lightning-Wildfire-Watch.pptx
+++ b/flashpoint/deck/FlashPoint-Lightning-Wildfire-Watch.pptx
@@ -5179,7 +5179,7 @@
                 <a:ea typeface="Cambria" pitchFamily="34" charset="-122"/>
                 <a:cs typeface="Cambria" pitchFamily="34" charset="-120"/>
               </a:rPr>
-              <a:t>51 + 51</a:t>
+              <a:t>0 / 17</a:t>
             </a:r>
             <a:endParaRPr lang="en-US" sz="4000" dirty="0"/>
           </a:p>
@@ -5218,7 +5218,7 @@
                 <a:ea typeface="Calibri" pitchFamily="34" charset="-122"/>
                 <a:cs typeface="Calibri" pitchFamily="34" charset="-120"/>
               </a:rPr>
-              <a:t>mic + camera nodes in one connected Chicagoland array</a:t>
+              <a:t>audio-only detections that survived dual-satellite review</a:t>
             </a:r>
             <a:endParaRPr lang="en-US" sz="1180" dirty="0"/>
           </a:p>
@@ -5286,7 +5286,7 @@
                 <a:ea typeface="Cambria" pitchFamily="34" charset="-122"/>
                 <a:cs typeface="Cambria" pitchFamily="34" charset="-120"/>
               </a:rPr>
-              <a:t>216 m</a:t>
+              <a:t>3.1 km</a:t>
             </a:r>
             <a:endParaRPr lang="en-US" sz="4000" dirty="0"/>
           </a:p>
@@ -5325,7 +5325,7 @@
                 <a:ea typeface="Calibri" pitchFamily="34" charset="-122"/>
                 <a:cs typeface="Calibri" pitchFamily="34" charset="-120"/>
               </a:rPr>
-              <a:t>median strike error simulated on real coordinates</a:t>
+              <a:t>closest GLM flash to the fire point — 3 h before discovery</a:t>
             </a:r>
             <a:endParaRPr lang="en-US" sz="1180" dirty="0"/>
           </a:p>
@@ -5393,7 +5393,7 @@
                 <a:ea typeface="Cambria" pitchFamily="34" charset="-122"/>
                 <a:cs typeface="Cambria" pitchFamily="34" charset="-120"/>
               </a:rPr>
-              <a:t>779</a:t>
+              <a:t>22</a:t>
             </a:r>
             <a:endParaRPr lang="en-US" sz="4000" dirty="0"/>
           </a:p>
@@ -5432,7 +5432,7 @@
                 <a:ea typeface="Calibri" pitchFamily="34" charset="-122"/>
                 <a:cs typeface="Calibri" pitchFamily="34" charset="-120"/>
               </a:rPr>
-              <a:t>audio clips recorded beside the Kitten Fire, July 2025</a:t>
+              <a:t>flash-to-bang arrivals recovered inside archived clips</a:t>
             </a:r>
             <a:endParaRPr lang="en-US" sz="1180" dirty="0"/>
           </a:p>
@@ -5485,7 +5485,7 @@
                 <a:ea typeface="Calibri" pitchFamily="34" charset="-122"/>
                 <a:cs typeface="Calibri" pitchFamily="34" charset="-120"/>
               </a:rPr>
-              <a:t>authenticated data pull → Kitten Fire retrospective (did the node hear the storm that started it?) → build the storm-mode controller with a camp team.</a:t>
+              <a:t>build the storm-mode controller + flash/RF/audio fusion with the camp team — the retrospective proved why every leg is necessary.</a:t>
             </a:r>
             <a:endParaRPr lang="en-US" sz="1500" dirty="0"/>
           </a:p>
@@ -10593,7 +10593,7 @@
                 <a:ea typeface="Calibri" pitchFamily="34" charset="-122"/>
                 <a:cs typeface="Calibri" pitchFamily="34" charset="-120"/>
               </a:rPr>
-              <a:t>FEASIBILITY · THE ARCHIVE ALREADY HOLDS THE PROOF</a:t>
+              <a:t>PRELIMINARY RESULTS · WE RAN IT — AND LET SATELLITES GRADE IT</a:t>
             </a:r>
             <a:endParaRPr lang="en-US" sz="1200" dirty="0"/>
           </a:p>
@@ -10624,7 +10624,7 @@
               <a:buNone/>
             </a:pPr>
             <a:r>
-              <a:rPr lang="en-US" sz="3000" b="1" dirty="0">
+              <a:rPr lang="en-US" sz="2800" b="1" dirty="0">
                 <a:solidFill>
                   <a:srgbClr val="FFFFFF"/>
                 </a:solidFill>
@@ -10632,9 +10632,9 @@
                 <a:ea typeface="Cambria" pitchFamily="34" charset="-122"/>
                 <a:cs typeface="Cambria" pitchFamily="34" charset="-120"/>
               </a:rPr>
-              <a:t>We found a lightning fire 6 km from a listening node</a:t>
-            </a:r>
-            <a:endParaRPr lang="en-US" sz="3000" dirty="0"/>
+              <a:t>Two satellites falsified our first result — then found the real storm</a:t>
+            </a:r>
+            <a:endParaRPr lang="en-US" sz="2800" dirty="0"/>
           </a:p>
         </p:txBody>
       </p:sp>
@@ -10663,7 +10663,7 @@
               <a:buNone/>
             </a:pPr>
             <a:r>
-              <a:rPr lang="en-US" sz="1250" dirty="0">
+              <a:rPr lang="en-US" sz="1200" dirty="0">
                 <a:solidFill>
                   <a:srgbClr val="AFC0D8"/>
                 </a:solidFill>
@@ -10671,9 +10671,9 @@
                 <a:ea typeface="Calibri" pitchFamily="34" charset="-122"/>
                 <a:cs typeface="Calibri" pitchFamily="34" charset="-120"/>
               </a:rPr>
-              <a:t>Method: federal WFIGS wildfire records (natural-cause, since 2023) cross-referenced against each fire-country node's actual data archive — run live on July 21 2026.</a:t>
-            </a:r>
-            <a:endParaRPr lang="en-US" sz="1250" dirty="0"/>
+              <a:t>Retrospective on the Kitten Fire (Grand Teton, discovered 02:04 UT Jul 3 2025, ~12 km from node W06C): 518 archived audio clips analyzed, then cross-validated against GOES-18 AND GOES-19 GLM lightning data.</a:t>
+            </a:r>
+            <a:endParaRPr lang="en-US" sz="1200" dirty="0"/>
           </a:p>
         </p:txBody>
       </p:sp>
@@ -10721,7 +10721,7 @@
             <a:avLst/>
           </a:prstGeom>
           <a:solidFill>
-            <a:srgbClr val="E0592A"/>
+            <a:srgbClr val="F5B722"/>
           </a:solidFill>
           <a:ln/>
         </p:spPr>
@@ -10777,13 +10777,13 @@
             <a:r>
               <a:rPr lang="en-US" sz="1500" b="1" dirty="0">
                 <a:solidFill>
-                  <a:srgbClr val="E0592A"/>
+                  <a:srgbClr val="F5B722"/>
                 </a:solidFill>
                 <a:latin typeface="Cambria" pitchFamily="34" charset="0"/>
                 <a:ea typeface="Cambria" pitchFamily="34" charset="-122"/>
                 <a:cs typeface="Cambria" pitchFamily="34" charset="-120"/>
               </a:rPr>
-              <a:t>★ THE KITTEN FIRE — July 3, 2025</a:t>
+              <a:t>★ THE AUDIT — audio alone, falsified</a:t>
             </a:r>
             <a:endParaRPr lang="en-US" sz="1500" dirty="0"/>
           </a:p>
@@ -10822,7 +10822,7 @@
                 <a:ea typeface="Calibri" pitchFamily="34" charset="-122"/>
                 <a:cs typeface="Calibri" pitchFamily="34" charset="-120"/>
               </a:rPr>
-              <a:t>Natural-cause fire, Grand Teton country — discovered 6 km from node W06C, squarely inside thunder range. That same window, the node recorded:</a:t>
+              <a:t>A v0 acoustic classifier (low-band transients + anemometer wind veto) proposed thunder candidates. We let two independent satellite lightning mappers grade every one:</a:t>
             </a:r>
             <a:endParaRPr lang="en-US" sz="1180" dirty="0"/>
           </a:p>
@@ -10861,7 +10861,7 @@
                 <a:ea typeface="Cambria" pitchFamily="34" charset="-122"/>
                 <a:cs typeface="Cambria" pitchFamily="34" charset="-120"/>
               </a:rPr>
-              <a:t>779</a:t>
+              <a:t>17</a:t>
             </a:r>
             <a:endParaRPr lang="en-US" sz="2500" dirty="0"/>
           </a:p>
@@ -10900,7 +10900,7 @@
                 <a:ea typeface="Calibri" pitchFamily="34" charset="-122"/>
                 <a:cs typeface="Calibri" pitchFamily="34" charset="-120"/>
               </a:rPr>
-              <a:t>audio clips (5.5-min cadence — a storm's thunder is almost certainly in them)</a:t>
+              <a:t>confident 'thunder' detections from 518 archived clips</a:t>
             </a:r>
             <a:endParaRPr lang="en-US" sz="1080" dirty="0"/>
           </a:p>
@@ -10939,7 +10939,7 @@
                 <a:ea typeface="Cambria" pitchFamily="34" charset="-122"/>
                 <a:cs typeface="Cambria" pitchFamily="34" charset="-120"/>
               </a:rPr>
-              <a:t>2,739</a:t>
+              <a:t>0 / 17</a:t>
             </a:r>
             <a:endParaRPr lang="en-US" sz="2500" dirty="0"/>
           </a:p>
@@ -10978,7 +10978,7 @@
                 <a:ea typeface="Calibri" pitchFamily="34" charset="-122"/>
                 <a:cs typeface="Calibri" pitchFamily="34" charset="-120"/>
               </a:rPr>
-              <a:t>PTZ-YOLO camera frames + thermal &amp; sky imagery</a:t>
+              <a:t>survived GLM review — no flash within 50 km, either satellite, any event</a:t>
             </a:r>
             <a:endParaRPr lang="en-US" sz="1080" dirty="0"/>
           </a:p>
@@ -11017,7 +11017,7 @@
                 <a:ea typeface="Cambria" pitchFamily="34" charset="-122"/>
                 <a:cs typeface="Cambria" pitchFamily="34" charset="-120"/>
               </a:rPr>
-              <a:t>51,701</a:t>
+              <a:t>Lesson</a:t>
             </a:r>
             <a:endParaRPr lang="en-US" sz="2500" dirty="0"/>
           </a:p>
@@ -11056,7 +11056,7 @@
                 <a:ea typeface="Calibri" pitchFamily="34" charset="-122"/>
                 <a:cs typeface="Calibri" pitchFamily="34" charset="-120"/>
               </a:rPr>
-              <a:t>weather records — full storm reconstruction, July 1–4</a:t>
+              <a:t>single-modality detection false-alarms with total confidence. Fusion isn't a feature — it's the design.</a:t>
             </a:r>
             <a:endParaRPr lang="en-US" sz="1080" dirty="0"/>
           </a:p>
@@ -11095,7 +11095,7 @@
                 <a:ea typeface="Cambria" pitchFamily="34" charset="-122"/>
                 <a:cs typeface="Cambria" pitchFamily="34" charset="-120"/>
               </a:rPr>
-              <a:t>Everything needed for a post-hoc detection test — from data that already exists.</a:t>
+              <a:t>Falsification is a feature: the pipeline catches its own plausible-but-wrong answers.</a:t>
             </a:r>
             <a:endParaRPr lang="en-US" sz="1150" dirty="0"/>
           </a:p>
@@ -11145,7 +11145,7 @@
             <a:avLst/>
           </a:prstGeom>
           <a:solidFill>
-            <a:srgbClr val="F5B722"/>
+            <a:srgbClr val="E0592A"/>
           </a:solidFill>
           <a:ln/>
         </p:spPr>
@@ -11201,13 +11201,13 @@
             <a:r>
               <a:rPr lang="en-US" sz="1500" b="1" dirty="0">
                 <a:solidFill>
-                  <a:srgbClr val="F5B722"/>
+                  <a:srgbClr val="E0592A"/>
                 </a:solidFill>
                 <a:latin typeface="Cambria" pitchFamily="34" charset="0"/>
                 <a:ea typeface="Cambria" pitchFamily="34" charset="-122"/>
                 <a:cs typeface="Cambria" pitchFamily="34" charset="-120"/>
               </a:rPr>
-              <a:t>★ THE SELMA BUST — July 8, 2025</a:t>
+              <a:t>★ THE REAL STORM — found via GLM</a:t>
             </a:r>
             <a:endParaRPr lang="en-US" sz="1500" dirty="0"/>
           </a:p>
@@ -11246,7 +11246,7 @@
                 <a:ea typeface="Calibri" pitchFamily="34" charset="-122"/>
                 <a:cs typeface="Calibri" pitchFamily="34" charset="-120"/>
               </a:rPr>
-              <a:t>Four natural-cause fires discovered the same day, 14–22 km from node W067 in Oregon's Siskiyous — the classic lightning-bust signature. The node's archive holds:</a:t>
+              <a:t>Scanning satellite lightning around the fire point located the actual ignition storm — and satellite-anchored re-listening recovered what audio-only had missed:</a:t>
             </a:r>
             <a:endParaRPr lang="en-US" sz="1180" dirty="0"/>
           </a:p>
@@ -11285,7 +11285,7 @@
                 <a:ea typeface="Cambria" pitchFamily="34" charset="-122"/>
                 <a:cs typeface="Cambria" pitchFamily="34" charset="-120"/>
               </a:rPr>
-              <a:t>216</a:t>
+              <a:t>219</a:t>
             </a:r>
             <a:endParaRPr lang="en-US" sz="2500" dirty="0"/>
           </a:p>
@@ -11324,7 +11324,7 @@
                 <a:ea typeface="Calibri" pitchFamily="34" charset="-122"/>
                 <a:cs typeface="Calibri" pitchFamily="34" charset="-120"/>
               </a:rPr>
-              <a:t>sky / left / bottom images, hourly — storm approach, then smoke columns</a:t>
+              <a:t>GLM flashes ≤25 km, 22:00–00:00 UT Jul 2 — closest 3.1 km from the fire point; discovery 3 h later</a:t>
             </a:r>
             <a:endParaRPr lang="en-US" sz="1080" dirty="0"/>
           </a:p>
@@ -11363,7 +11363,7 @@
                 <a:ea typeface="Cambria" pitchFamily="34" charset="-122"/>
                 <a:cs typeface="Cambria" pitchFamily="34" charset="-120"/>
               </a:rPr>
-              <a:t>25,911</a:t>
+              <a:t>22</a:t>
             </a:r>
             <a:endParaRPr lang="en-US" sz="2500" dirty="0"/>
           </a:p>
@@ -11402,7 +11402,7 @@
                 <a:ea typeface="Calibri" pitchFamily="34" charset="-122"/>
                 <a:cs typeface="Calibri" pitchFamily="34" charset="-120"/>
               </a:rPr>
-              <a:t>met records incl. rain accumulation — the dry-lightning flag is testable on a storm that verifiably started fires</a:t>
+              <a:t>flash→bang arrivals landing inside archived clips — thunder recovered, buried in the rain noise that blinded audio-only</a:t>
             </a:r>
             <a:endParaRPr lang="en-US" sz="1080" dirty="0"/>
           </a:p>
@@ -11441,7 +11441,7 @@
                 <a:ea typeface="Cambria" pitchFamily="34" charset="-122"/>
                 <a:cs typeface="Cambria" pitchFamily="34" charset="-120"/>
               </a:rPr>
-              <a:t>4 fires</a:t>
+              <a:t>Wall.</a:t>
             </a:r>
             <a:endParaRPr lang="en-US" sz="2500" dirty="0"/>
           </a:p>
@@ -11480,7 +11480,7 @@
                 <a:ea typeface="Calibri" pitchFamily="34" charset="-122"/>
                 <a:cs typeface="Calibri" pitchFamily="34" charset="-120"/>
               </a:rPr>
-              <a:t>one storm: N Fork Deer Creek (39.8 ac), Holcomb Peak, Cedar Flat, Esterly Mine</a:t>
+              <a:t>during the ignition storm, the node's PTZ camera was pointed at a cabin wall — storm-mode camera control exists for exactly this</a:t>
             </a:r>
             <a:endParaRPr lang="en-US" sz="1080" dirty="0"/>
           </a:p>
@@ -11519,7 +11519,7 @@
                 <a:ea typeface="Cambria" pitchFamily="34" charset="-122"/>
                 <a:cs typeface="Cambria" pitchFamily="34" charset="-120"/>
               </a:rPr>
-              <a:t>Walk into camp with a validated retrospective result, not just a proposal.</a:t>
+              <a:t>Preliminary results, not promises — the pipeline already ran end-to-end.</a:t>
             </a:r>
             <a:endParaRPr lang="en-US" sz="1150" dirty="0"/>
           </a:p>
@@ -11534,7 +11534,7 @@
         <p:spPr>
           <a:xfrm>
             <a:off x="548640" y="6263640"/>
-            <a:ext cx="11094415" cy="274320"/>
+            <a:ext cx="11094415" cy="411480"/>
           </a:xfrm>
           <a:prstGeom prst="rect">
             <a:avLst/>
@@ -11550,7 +11550,7 @@
               <a:buNone/>
             </a:pPr>
             <a:r>
-              <a:rPr lang="en-US" sz="1000" i="1" dirty="0">
+              <a:rPr lang="en-US" sz="950" i="1" dirty="0">
                 <a:solidFill>
                   <a:srgbClr val="AFC0D8"/>
                 </a:solidFill>
@@ -11558,9 +11558,9 @@
                 <a:ea typeface="Calibri" pitchFamily="34" charset="-122"/>
                 <a:cs typeface="Calibri" pitchFamily="34" charset="-120"/>
               </a:rPr>
-              <a:t>Sources: NIFC WFIGS incident database × Sage data API archive counts (nodes W06C, W067).</a:t>
-            </a:r>
-            <a:endParaRPr lang="en-US" sz="1000" dirty="0"/>
+              <a:t>Also verified: the Selma bust — 14 natural-cause fires in one day (Jul 8 2025) near W067; node gauge 0.05 mm all week; SMAP soil moisture 0.084. Sources: Sage data API, NIFC WFIGS, GOES-18/19 GLM (AWS open data), NASA SMAP/POWER.</a:t>
+            </a:r>
+            <a:endParaRPr lang="en-US" sz="950" dirty="0"/>
           </a:p>
         </p:txBody>
       </p:sp>
